--- a/Presentacion_CuidaMayor_ProyectoTitulo.pptx
+++ b/Presentacion_CuidaMayor_ProyectoTitulo.pptx
@@ -1104,43 +1104,6 @@
         </a:p>
       </dgm:t>
     </dgm:pt>
-    <dgm:pt modelId="{CE4E30D0-4D0A-40F0-BD8A-10ADFDF6147F}">
-      <dgm:prSet/>
-      <dgm:spPr/>
-      <dgm:t>
-        <a:bodyPr/>
-        <a:lstStyle/>
-        <a:p>
-          <a:r>
-            <a:rPr lang="en-US" b="0"/>
-            <a:t>5.  Resultados</a:t>
-          </a:r>
-          <a:endParaRPr lang="en-US"/>
-        </a:p>
-      </dgm:t>
-    </dgm:pt>
-    <dgm:pt modelId="{AAF82A36-AC75-4AD3-A345-BEB2545C17DC}" type="parTrans" cxnId="{C46440EC-CC3C-4FE8-949E-BC18DC3098DA}">
-      <dgm:prSet/>
-      <dgm:spPr/>
-      <dgm:t>
-        <a:bodyPr/>
-        <a:lstStyle/>
-        <a:p>
-          <a:endParaRPr lang="en-US"/>
-        </a:p>
-      </dgm:t>
-    </dgm:pt>
-    <dgm:pt modelId="{F5C21A98-2FC9-4AED-A91B-A3886EDDC7FD}" type="sibTrans" cxnId="{C46440EC-CC3C-4FE8-949E-BC18DC3098DA}">
-      <dgm:prSet/>
-      <dgm:spPr/>
-      <dgm:t>
-        <a:bodyPr/>
-        <a:lstStyle/>
-        <a:p>
-          <a:endParaRPr lang="en-US"/>
-        </a:p>
-      </dgm:t>
-    </dgm:pt>
     <dgm:pt modelId="{D0DF1148-6DB0-47FE-8056-EE9DC45091DF}">
       <dgm:prSet/>
       <dgm:spPr/>
@@ -1205,6 +1168,43 @@
       </dgm:t>
     </dgm:pt>
     <dgm:pt modelId="{1E677D54-8609-49EF-9BB5-F86FF3C43011}" type="sibTrans" cxnId="{5E4ADB6A-8D05-4158-AD69-98C7345893C3}">
+      <dgm:prSet/>
+      <dgm:spPr/>
+      <dgm:t>
+        <a:bodyPr/>
+        <a:lstStyle/>
+        <a:p>
+          <a:endParaRPr lang="en-US"/>
+        </a:p>
+      </dgm:t>
+    </dgm:pt>
+    <dgm:pt modelId="{CE4E30D0-4D0A-40F0-BD8A-10ADFDF6147F}">
+      <dgm:prSet/>
+      <dgm:spPr/>
+      <dgm:t>
+        <a:bodyPr/>
+        <a:lstStyle/>
+        <a:p>
+          <a:r>
+            <a:rPr lang="en-US" b="0"/>
+            <a:t>5.  Resultados</a:t>
+          </a:r>
+          <a:endParaRPr lang="en-US"/>
+        </a:p>
+      </dgm:t>
+    </dgm:pt>
+    <dgm:pt modelId="{F5C21A98-2FC9-4AED-A91B-A3886EDDC7FD}" type="sibTrans" cxnId="{C46440EC-CC3C-4FE8-949E-BC18DC3098DA}">
+      <dgm:prSet/>
+      <dgm:spPr/>
+      <dgm:t>
+        <a:bodyPr/>
+        <a:lstStyle/>
+        <a:p>
+          <a:endParaRPr lang="en-US"/>
+        </a:p>
+      </dgm:t>
+    </dgm:pt>
+    <dgm:pt modelId="{AAF82A36-AC75-4AD3-A345-BEB2545C17DC}" type="parTrans" cxnId="{C46440EC-CC3C-4FE8-949E-BC18DC3098DA}">
       <dgm:prSet/>
       <dgm:spPr/>
       <dgm:t>
@@ -4154,7 +4154,7 @@
             <a:fld id="{89347D60-E39B-E041-B6CE-3FDC1A8BB989}" type="datetimeFigureOut">
               <a:rPr lang="es-ES_tradnl" smtClean="0"/>
               <a:pPr/>
-              <a:t>02/07/2026</a:t>
+              <a:t>03/07/2026</a:t>
             </a:fld>
             <a:endParaRPr lang="es-ES_tradnl"/>
           </a:p>
@@ -4639,7 +4639,7 @@
             <a:fld id="{F4568A57-AEEC-4464-B3C2-DCDD7625AB8D}" type="datetime1">
               <a:rPr lang="es-ES_tradnl" smtClean="0"/>
               <a:pPr/>
-              <a:t>02/07/2026</a:t>
+              <a:t>03/07/2026</a:t>
             </a:fld>
             <a:endParaRPr lang="es-ES_tradnl"/>
           </a:p>
@@ -4806,7 +4806,7 @@
             <a:fld id="{C1602C51-CCE5-4E4E-B562-15682A15C3DF}" type="datetime1">
               <a:rPr lang="es-ES_tradnl" smtClean="0"/>
               <a:pPr/>
-              <a:t>02/07/2026</a:t>
+              <a:t>03/07/2026</a:t>
             </a:fld>
             <a:endParaRPr lang="es-ES_tradnl"/>
           </a:p>
@@ -4983,7 +4983,7 @@
             <a:fld id="{3EABF483-CE49-4C44-B4E1-6372F2D08A04}" type="datetime1">
               <a:rPr lang="es-ES_tradnl" smtClean="0"/>
               <a:pPr/>
-              <a:t>02/07/2026</a:t>
+              <a:t>03/07/2026</a:t>
             </a:fld>
             <a:endParaRPr lang="es-ES_tradnl"/>
           </a:p>
@@ -5150,7 +5150,7 @@
             <a:fld id="{1EBDCCD4-780C-41DF-BF06-777173EFDEEB}" type="datetime1">
               <a:rPr lang="es-ES_tradnl" smtClean="0"/>
               <a:pPr/>
-              <a:t>02/07/2026</a:t>
+              <a:t>03/07/2026</a:t>
             </a:fld>
             <a:endParaRPr lang="es-ES_tradnl"/>
           </a:p>
@@ -5391,7 +5391,7 @@
             <a:fld id="{49B8BDFF-D5A3-46B1-98F2-1BB257860C91}" type="datetime1">
               <a:rPr lang="es-ES_tradnl" smtClean="0"/>
               <a:pPr/>
-              <a:t>02/07/2026</a:t>
+              <a:t>03/07/2026</a:t>
             </a:fld>
             <a:endParaRPr lang="es-ES_tradnl"/>
           </a:p>
@@ -5620,7 +5620,7 @@
             <a:fld id="{EB8BEF73-6D63-4ED7-A166-942711098C6B}" type="datetime1">
               <a:rPr lang="es-ES_tradnl" smtClean="0"/>
               <a:pPr/>
-              <a:t>02/07/2026</a:t>
+              <a:t>03/07/2026</a:t>
             </a:fld>
             <a:endParaRPr lang="es-ES_tradnl"/>
           </a:p>
@@ -5984,7 +5984,7 @@
             <a:fld id="{5CB537EE-D15B-4E6F-B388-F44B9769E122}" type="datetime1">
               <a:rPr lang="es-ES_tradnl" smtClean="0"/>
               <a:pPr/>
-              <a:t>02/07/2026</a:t>
+              <a:t>03/07/2026</a:t>
             </a:fld>
             <a:endParaRPr lang="es-ES_tradnl"/>
           </a:p>
@@ -6099,7 +6099,7 @@
             <a:fld id="{74189503-558A-4680-A00C-D1B9C07BADB8}" type="datetime1">
               <a:rPr lang="es-ES_tradnl" smtClean="0"/>
               <a:pPr/>
-              <a:t>02/07/2026</a:t>
+              <a:t>03/07/2026</a:t>
             </a:fld>
             <a:endParaRPr lang="es-ES_tradnl"/>
           </a:p>
@@ -6191,7 +6191,7 @@
             <a:fld id="{379CC10B-C27E-462F-BCC1-B5EBAA7D286E}" type="datetime1">
               <a:rPr lang="es-ES_tradnl" smtClean="0"/>
               <a:pPr/>
-              <a:t>02/07/2026</a:t>
+              <a:t>03/07/2026</a:t>
             </a:fld>
             <a:endParaRPr lang="es-ES_tradnl"/>
           </a:p>
@@ -6465,7 +6465,7 @@
             <a:fld id="{E7F30DD6-8507-468F-A93F-66BD6B9C72D1}" type="datetime1">
               <a:rPr lang="es-ES_tradnl" smtClean="0"/>
               <a:pPr/>
-              <a:t>02/07/2026</a:t>
+              <a:t>03/07/2026</a:t>
             </a:fld>
             <a:endParaRPr lang="es-ES_tradnl"/>
           </a:p>
@@ -6719,7 +6719,7 @@
             <a:fld id="{7D90C4F6-18CC-4785-B351-29A3169A06D8}" type="datetime1">
               <a:rPr lang="es-ES_tradnl" smtClean="0"/>
               <a:pPr/>
-              <a:t>02/07/2026</a:t>
+              <a:t>03/07/2026</a:t>
             </a:fld>
             <a:endParaRPr lang="es-ES_tradnl"/>
           </a:p>
@@ -6958,7 +6958,7 @@
             <a:fld id="{45F7DF9B-7D3C-4A6D-9986-08978C4D1418}" type="datetime1">
               <a:rPr lang="es-ES_tradnl" smtClean="0"/>
               <a:pPr/>
-              <a:t>02/07/2026</a:t>
+              <a:t>03/07/2026</a:t>
             </a:fld>
             <a:endParaRPr lang="es-ES_tradnl"/>
           </a:p>
@@ -8489,140 +8489,6 @@
           </a:prstGeom>
         </p:spPr>
       </p:pic>
-      <p:sp>
-        <p:nvSpPr>
-          <p:cNvPr id="5" name="TextBox 4"/>
-          <p:cNvSpPr txBox="1"/>
-          <p:nvPr/>
-        </p:nvSpPr>
-        <p:spPr>
-          <a:xfrm>
-            <a:off x="457200" y="5742432"/>
-            <a:ext cx="8229600" cy="320040"/>
-          </a:xfrm>
-          <a:prstGeom prst="rect">
-            <a:avLst/>
-          </a:prstGeom>
-          <a:noFill/>
-        </p:spPr>
-        <p:txBody>
-          <a:bodyPr wrap="square">
-            <a:spAutoFit/>
-          </a:bodyPr>
-          <a:lstStyle/>
-          <a:p>
-            <a:pPr algn="ctr"/>
-            <a:r>
-              <a:rPr sz="1000" i="1" dirty="0" err="1">
-                <a:solidFill>
-                  <a:srgbClr val="595959"/>
-                </a:solidFill>
-                <a:latin typeface="Arial"/>
-              </a:rPr>
-              <a:t>Figura</a:t>
-            </a:r>
-            <a:r>
-              <a:rPr sz="1000" i="1" dirty="0">
-                <a:solidFill>
-                  <a:srgbClr val="595959"/>
-                </a:solidFill>
-                <a:latin typeface="Arial"/>
-              </a:rPr>
-              <a:t> 2: </a:t>
-            </a:r>
-            <a:r>
-              <a:rPr sz="1000" i="1" dirty="0" err="1">
-                <a:solidFill>
-                  <a:srgbClr val="595959"/>
-                </a:solidFill>
-                <a:latin typeface="Arial"/>
-              </a:rPr>
-              <a:t>Diagrama</a:t>
-            </a:r>
-            <a:r>
-              <a:rPr sz="1000" i="1" dirty="0">
-                <a:solidFill>
-                  <a:srgbClr val="595959"/>
-                </a:solidFill>
-                <a:latin typeface="Arial"/>
-              </a:rPr>
-              <a:t> BPMN del </a:t>
-            </a:r>
-            <a:r>
-              <a:rPr sz="1000" i="1" dirty="0" err="1">
-                <a:solidFill>
-                  <a:srgbClr val="595959"/>
-                </a:solidFill>
-                <a:latin typeface="Arial"/>
-              </a:rPr>
-              <a:t>proceso</a:t>
-            </a:r>
-            <a:r>
-              <a:rPr sz="1000" i="1" dirty="0">
-                <a:solidFill>
-                  <a:srgbClr val="595959"/>
-                </a:solidFill>
-                <a:latin typeface="Arial"/>
-              </a:rPr>
-              <a:t> de </a:t>
-            </a:r>
-            <a:r>
-              <a:rPr sz="1000" i="1" dirty="0" err="1">
-                <a:solidFill>
-                  <a:srgbClr val="595959"/>
-                </a:solidFill>
-                <a:latin typeface="Arial"/>
-              </a:rPr>
-              <a:t>cuidado</a:t>
-            </a:r>
-            <a:r>
-              <a:rPr sz="1000" i="1" dirty="0">
-                <a:solidFill>
-                  <a:srgbClr val="595959"/>
-                </a:solidFill>
-                <a:latin typeface="Arial"/>
-              </a:rPr>
-              <a:t> </a:t>
-            </a:r>
-            <a:r>
-              <a:rPr sz="1000" i="1" dirty="0" err="1">
-                <a:solidFill>
-                  <a:srgbClr val="595959"/>
-                </a:solidFill>
-                <a:latin typeface="Arial"/>
-              </a:rPr>
-              <a:t>diario</a:t>
-            </a:r>
-            <a:r>
-              <a:rPr sz="1000" i="1" dirty="0">
-                <a:solidFill>
-                  <a:srgbClr val="595959"/>
-                </a:solidFill>
-                <a:latin typeface="Arial"/>
-              </a:rPr>
-              <a:t> del </a:t>
-            </a:r>
-            <a:r>
-              <a:rPr sz="1000" i="1" dirty="0" err="1">
-                <a:solidFill>
-                  <a:srgbClr val="595959"/>
-                </a:solidFill>
-                <a:latin typeface="Arial"/>
-              </a:rPr>
-              <a:t>adulto</a:t>
-            </a:r>
-            <a:r>
-              <a:rPr sz="1000" i="1" dirty="0">
-                <a:solidFill>
-                  <a:srgbClr val="595959"/>
-                </a:solidFill>
-                <a:latin typeface="Arial"/>
-              </a:rPr>
-              <a:t> mayor.</a:t>
-            </a:r>
-          </a:p>
-        </p:txBody>
-      </p:sp>
     </p:spTree>
   </p:cSld>
   <p:clrMapOvr>
@@ -16125,7 +15991,7 @@
         <p:spPr>
           <a:xfrm>
             <a:off x="630936" y="3977639"/>
-            <a:ext cx="7882127" cy="1601272"/>
+            <a:ext cx="7882127" cy="1811330"/>
           </a:xfrm>
           <a:prstGeom prst="rect">
             <a:avLst/>
@@ -16208,7 +16074,7 @@
                 </a:solidFill>
                 <a:latin typeface="Arial"/>
               </a:rPr>
-              <a:t> al 100% </a:t>
+              <a:t> </a:t>
             </a:r>
             <a:r>
               <a:rPr sz="1300" b="0" dirty="0" err="1">
@@ -16328,14 +16194,38 @@
               <a:t>prueba</a:t>
             </a:r>
             <a:r>
-              <a:rPr sz="1300" b="0" dirty="0">
+              <a:rPr lang="es-CL" sz="1300" dirty="0">
                 <a:solidFill>
                   <a:srgbClr val="222222"/>
                 </a:solidFill>
                 <a:latin typeface="Arial"/>
               </a:rPr>
-              <a:t>.</a:t>
-            </a:r>
+              <a:t> pero </a:t>
+            </a:r>
+            <a:r>
+              <a:rPr lang="es-CL" sz="1300" dirty="0" err="1">
+                <a:solidFill>
+                  <a:srgbClr val="222222"/>
+                </a:solidFill>
+                <a:latin typeface="Arial"/>
+              </a:rPr>
+              <a:t>habran</a:t>
+            </a:r>
+            <a:r>
+              <a:rPr lang="es-CL" sz="1300" dirty="0">
+                <a:solidFill>
+                  <a:srgbClr val="222222"/>
+                </a:solidFill>
+                <a:latin typeface="Arial"/>
+              </a:rPr>
+              <a:t> futuras mejoras</a:t>
+            </a:r>
+            <a:endParaRPr sz="1300" b="0" dirty="0">
+              <a:solidFill>
+                <a:srgbClr val="222222"/>
+              </a:solidFill>
+              <a:latin typeface="Arial"/>
+            </a:endParaRPr>
           </a:p>
           <a:p>
             <a:pPr>
@@ -19808,6 +19698,26 @@
               <a:t> a resolver </a:t>
             </a:r>
             <a:r>
+              <a:rPr lang="es-CL" dirty="0">
+                <a:solidFill>
+                  <a:srgbClr val="222222"/>
+                </a:solidFill>
+                <a:latin typeface="Times New Roman" panose="02020603050405020304" pitchFamily="18" charset="0"/>
+                <a:cs typeface="Times New Roman" panose="02020603050405020304" pitchFamily="18" charset="0"/>
+              </a:rPr>
+              <a:t>temas</a:t>
+            </a:r>
+            <a:r>
+              <a:rPr sz="1800" b="0" dirty="0">
+                <a:solidFill>
+                  <a:srgbClr val="222222"/>
+                </a:solidFill>
+                <a:latin typeface="Times New Roman" panose="02020603050405020304" pitchFamily="18" charset="0"/>
+                <a:cs typeface="Times New Roman" panose="02020603050405020304" pitchFamily="18" charset="0"/>
+              </a:rPr>
+              <a:t> </a:t>
+            </a:r>
+            <a:r>
               <a:rPr sz="1800" b="0" dirty="0" err="1">
                 <a:solidFill>
                   <a:srgbClr val="222222"/>
@@ -19815,27 +19725,17 @@
                 <a:latin typeface="Times New Roman" panose="02020603050405020304" pitchFamily="18" charset="0"/>
                 <a:cs typeface="Times New Roman" panose="02020603050405020304" pitchFamily="18" charset="0"/>
               </a:rPr>
-              <a:t>parcelas</a:t>
-            </a:r>
-            <a:r>
-              <a:rPr sz="1800" b="0" dirty="0">
-                <a:solidFill>
-                  <a:srgbClr val="222222"/>
-                </a:solidFill>
-                <a:latin typeface="Times New Roman" panose="02020603050405020304" pitchFamily="18" charset="0"/>
-                <a:cs typeface="Times New Roman" panose="02020603050405020304" pitchFamily="18" charset="0"/>
-              </a:rPr>
-              <a:t> </a:t>
-            </a:r>
-            <a:r>
-              <a:rPr sz="1800" b="0" dirty="0" err="1">
-                <a:solidFill>
-                  <a:srgbClr val="222222"/>
-                </a:solidFill>
-                <a:latin typeface="Times New Roman" panose="02020603050405020304" pitchFamily="18" charset="0"/>
-                <a:cs typeface="Times New Roman" panose="02020603050405020304" pitchFamily="18" charset="0"/>
-              </a:rPr>
-              <a:t>aisladas</a:t>
+              <a:t>aislad</a:t>
+            </a:r>
+            <a:r>
+              <a:rPr lang="es-CL" sz="1800" b="0" dirty="0">
+                <a:solidFill>
+                  <a:srgbClr val="222222"/>
+                </a:solidFill>
+                <a:latin typeface="Times New Roman" panose="02020603050405020304" pitchFamily="18" charset="0"/>
+                <a:cs typeface="Times New Roman" panose="02020603050405020304" pitchFamily="18" charset="0"/>
+              </a:rPr>
+              <a:t>os</a:t>
             </a:r>
             <a:r>
               <a:rPr sz="1800" b="0" dirty="0">
